--- a/오픈소스소프트웨어/4주차-2_vi에디터.pptx
+++ b/오픈소스소프트웨어/4주차-2_vi에디터.pptx
@@ -2210,6 +2210,13 @@
           </a:solidFill>
           <a:ln/>
         </p:spPr>
+        <p:txBody>
+          <a:bodyPr/>
+          <a:lstStyle/>
+          <a:p>
+            <a:endParaRPr lang="ko-KR" altLang="en-US"/>
+          </a:p>
+        </p:txBody>
       </p:sp>
       <p:sp>
         <p:nvSpPr>
@@ -2232,6 +2239,13 @@
           </a:solidFill>
           <a:ln/>
         </p:spPr>
+        <p:txBody>
+          <a:bodyPr/>
+          <a:lstStyle/>
+          <a:p>
+            <a:endParaRPr lang="ko-KR" altLang="en-US"/>
+          </a:p>
+        </p:txBody>
       </p:sp>
       <p:sp>
         <p:nvSpPr>
@@ -2254,6 +2268,13 @@
           </a:solidFill>
           <a:ln/>
         </p:spPr>
+        <p:txBody>
+          <a:bodyPr/>
+          <a:lstStyle/>
+          <a:p>
+            <a:endParaRPr lang="ko-KR" altLang="en-US"/>
+          </a:p>
+        </p:txBody>
       </p:sp>
       <p:sp>
         <p:nvSpPr>
@@ -2276,6 +2297,13 @@
           </a:solidFill>
           <a:ln/>
         </p:spPr>
+        <p:txBody>
+          <a:bodyPr/>
+          <a:lstStyle/>
+          <a:p>
+            <a:endParaRPr lang="ko-KR" altLang="en-US"/>
+          </a:p>
+        </p:txBody>
       </p:sp>
       <p:sp>
         <p:nvSpPr>
@@ -2298,6 +2326,13 @@
           </a:solidFill>
           <a:ln/>
         </p:spPr>
+        <p:txBody>
+          <a:bodyPr/>
+          <a:lstStyle/>
+          <a:p>
+            <a:endParaRPr lang="ko-KR" altLang="en-US"/>
+          </a:p>
+        </p:txBody>
       </p:sp>
       <p:sp>
         <p:nvSpPr>
@@ -2320,6 +2355,13 @@
           </a:solidFill>
           <a:ln/>
         </p:spPr>
+        <p:txBody>
+          <a:bodyPr/>
+          <a:lstStyle/>
+          <a:p>
+            <a:endParaRPr lang="ko-KR" altLang="en-US"/>
+          </a:p>
+        </p:txBody>
       </p:sp>
       <p:sp>
         <p:nvSpPr>
@@ -2342,6 +2384,13 @@
           </a:solidFill>
           <a:ln/>
         </p:spPr>
+        <p:txBody>
+          <a:bodyPr/>
+          <a:lstStyle/>
+          <a:p>
+            <a:endParaRPr lang="ko-KR" altLang="en-US"/>
+          </a:p>
+        </p:txBody>
       </p:sp>
       <p:sp>
         <p:nvSpPr>
@@ -2364,6 +2413,13 @@
           </a:solidFill>
           <a:ln/>
         </p:spPr>
+        <p:txBody>
+          <a:bodyPr/>
+          <a:lstStyle/>
+          <a:p>
+            <a:endParaRPr lang="ko-KR" altLang="en-US"/>
+          </a:p>
+        </p:txBody>
       </p:sp>
       <p:sp>
         <p:nvSpPr>
@@ -2389,6 +2445,13 @@
             <a:prstDash val="solid"/>
           </a:ln>
         </p:spPr>
+        <p:txBody>
+          <a:bodyPr/>
+          <a:lstStyle/>
+          <a:p>
+            <a:endParaRPr lang="ko-KR" altLang="en-US"/>
+          </a:p>
+        </p:txBody>
       </p:sp>
       <p:sp>
         <p:nvSpPr>
@@ -2414,6 +2477,13 @@
             <a:prstDash val="solid"/>
           </a:ln>
         </p:spPr>
+        <p:txBody>
+          <a:bodyPr/>
+          <a:lstStyle/>
+          <a:p>
+            <a:endParaRPr lang="ko-KR" altLang="en-US"/>
+          </a:p>
+        </p:txBody>
       </p:sp>
       <p:sp>
         <p:nvSpPr>
@@ -2439,6 +2509,13 @@
             <a:prstDash val="solid"/>
           </a:ln>
         </p:spPr>
+        <p:txBody>
+          <a:bodyPr/>
+          <a:lstStyle/>
+          <a:p>
+            <a:endParaRPr lang="ko-KR" altLang="en-US"/>
+          </a:p>
+        </p:txBody>
       </p:sp>
       <p:sp>
         <p:nvSpPr>
@@ -2464,6 +2541,13 @@
             <a:prstDash val="solid"/>
           </a:ln>
         </p:spPr>
+        <p:txBody>
+          <a:bodyPr/>
+          <a:lstStyle/>
+          <a:p>
+            <a:endParaRPr lang="ko-KR" altLang="en-US"/>
+          </a:p>
+        </p:txBody>
       </p:sp>
       <p:sp>
         <p:nvSpPr>
@@ -2489,6 +2573,13 @@
             <a:prstDash val="solid"/>
           </a:ln>
         </p:spPr>
+        <p:txBody>
+          <a:bodyPr/>
+          <a:lstStyle/>
+          <a:p>
+            <a:endParaRPr lang="ko-KR" altLang="en-US"/>
+          </a:p>
+        </p:txBody>
       </p:sp>
       <p:sp>
         <p:nvSpPr>
@@ -2514,6 +2605,13 @@
             <a:prstDash val="solid"/>
           </a:ln>
         </p:spPr>
+        <p:txBody>
+          <a:bodyPr/>
+          <a:lstStyle/>
+          <a:p>
+            <a:endParaRPr lang="ko-KR" altLang="en-US"/>
+          </a:p>
+        </p:txBody>
       </p:sp>
       <p:sp>
         <p:nvSpPr>
@@ -2539,6 +2637,13 @@
             <a:prstDash val="solid"/>
           </a:ln>
         </p:spPr>
+        <p:txBody>
+          <a:bodyPr/>
+          <a:lstStyle/>
+          <a:p>
+            <a:endParaRPr lang="ko-KR" altLang="en-US"/>
+          </a:p>
+        </p:txBody>
       </p:sp>
       <p:sp>
         <p:nvSpPr>
@@ -2747,6 +2852,13 @@
             <a:prstDash val="solid"/>
           </a:ln>
         </p:spPr>
+        <p:txBody>
+          <a:bodyPr/>
+          <a:lstStyle/>
+          <a:p>
+            <a:endParaRPr lang="ko-KR" altLang="en-US"/>
+          </a:p>
+        </p:txBody>
       </p:sp>
       <p:sp>
         <p:nvSpPr>
@@ -2933,6 +3045,13 @@
             </a:outerShdw>
           </a:effectLst>
         </p:spPr>
+        <p:txBody>
+          <a:bodyPr/>
+          <a:lstStyle/>
+          <a:p>
+            <a:endParaRPr lang="ko-KR" altLang="en-US"/>
+          </a:p>
+        </p:txBody>
       </p:sp>
       <p:sp>
         <p:nvSpPr>
@@ -2955,6 +3074,13 @@
           </a:solidFill>
           <a:ln/>
         </p:spPr>
+        <p:txBody>
+          <a:bodyPr/>
+          <a:lstStyle/>
+          <a:p>
+            <a:endParaRPr lang="ko-KR" altLang="en-US"/>
+          </a:p>
+        </p:txBody>
       </p:sp>
       <p:sp>
         <p:nvSpPr>
@@ -2975,6 +3101,13 @@
           </a:solidFill>
           <a:ln/>
         </p:spPr>
+        <p:txBody>
+          <a:bodyPr/>
+          <a:lstStyle/>
+          <a:p>
+            <a:endParaRPr lang="ko-KR" altLang="en-US"/>
+          </a:p>
+        </p:txBody>
       </p:sp>
       <p:sp>
         <p:nvSpPr>
@@ -2995,6 +3128,13 @@
           </a:solidFill>
           <a:ln/>
         </p:spPr>
+        <p:txBody>
+          <a:bodyPr/>
+          <a:lstStyle/>
+          <a:p>
+            <a:endParaRPr lang="ko-KR" altLang="en-US"/>
+          </a:p>
+        </p:txBody>
       </p:sp>
       <p:sp>
         <p:nvSpPr>
@@ -3015,6 +3155,13 @@
           </a:solidFill>
           <a:ln/>
         </p:spPr>
+        <p:txBody>
+          <a:bodyPr/>
+          <a:lstStyle/>
+          <a:p>
+            <a:endParaRPr lang="ko-KR" altLang="en-US"/>
+          </a:p>
+        </p:txBody>
       </p:sp>
       <p:sp>
         <p:nvSpPr>
@@ -3035,6 +3182,13 @@
           </a:solidFill>
           <a:ln/>
         </p:spPr>
+        <p:txBody>
+          <a:bodyPr/>
+          <a:lstStyle/>
+          <a:p>
+            <a:endParaRPr lang="ko-KR" altLang="en-US"/>
+          </a:p>
+        </p:txBody>
       </p:sp>
       <p:sp>
         <p:nvSpPr>
@@ -3276,6 +3430,13 @@
             <a:prstDash val="solid"/>
           </a:ln>
         </p:spPr>
+        <p:txBody>
+          <a:bodyPr/>
+          <a:lstStyle/>
+          <a:p>
+            <a:endParaRPr lang="ko-KR" altLang="en-US"/>
+          </a:p>
+        </p:txBody>
       </p:sp>
       <p:sp>
         <p:nvSpPr>
@@ -3568,6 +3729,13 @@
             </a:outerShdw>
           </a:effectLst>
         </p:spPr>
+        <p:txBody>
+          <a:bodyPr/>
+          <a:lstStyle/>
+          <a:p>
+            <a:endParaRPr lang="ko-KR" altLang="en-US"/>
+          </a:p>
+        </p:txBody>
       </p:sp>
       <p:sp>
         <p:nvSpPr>
@@ -3590,6 +3758,13 @@
           </a:solidFill>
           <a:ln/>
         </p:spPr>
+        <p:txBody>
+          <a:bodyPr/>
+          <a:lstStyle/>
+          <a:p>
+            <a:endParaRPr lang="ko-KR" altLang="en-US"/>
+          </a:p>
+        </p:txBody>
       </p:sp>
       <p:sp>
         <p:nvSpPr>
@@ -3610,6 +3785,13 @@
           </a:solidFill>
           <a:ln/>
         </p:spPr>
+        <p:txBody>
+          <a:bodyPr/>
+          <a:lstStyle/>
+          <a:p>
+            <a:endParaRPr lang="ko-KR" altLang="en-US"/>
+          </a:p>
+        </p:txBody>
       </p:sp>
       <p:sp>
         <p:nvSpPr>
@@ -3630,6 +3812,13 @@
           </a:solidFill>
           <a:ln/>
         </p:spPr>
+        <p:txBody>
+          <a:bodyPr/>
+          <a:lstStyle/>
+          <a:p>
+            <a:endParaRPr lang="ko-KR" altLang="en-US"/>
+          </a:p>
+        </p:txBody>
       </p:sp>
       <p:sp>
         <p:nvSpPr>
@@ -3650,6 +3839,13 @@
           </a:solidFill>
           <a:ln/>
         </p:spPr>
+        <p:txBody>
+          <a:bodyPr/>
+          <a:lstStyle/>
+          <a:p>
+            <a:endParaRPr lang="ko-KR" altLang="en-US"/>
+          </a:p>
+        </p:txBody>
       </p:sp>
       <p:sp>
         <p:nvSpPr>
@@ -3670,6 +3866,13 @@
           </a:solidFill>
           <a:ln/>
         </p:spPr>
+        <p:txBody>
+          <a:bodyPr/>
+          <a:lstStyle/>
+          <a:p>
+            <a:endParaRPr lang="ko-KR" altLang="en-US"/>
+          </a:p>
+        </p:txBody>
       </p:sp>
       <p:sp>
         <p:nvSpPr>
@@ -3789,6 +3992,13 @@
             <a:prstDash val="solid"/>
           </a:ln>
         </p:spPr>
+        <p:txBody>
+          <a:bodyPr/>
+          <a:lstStyle/>
+          <a:p>
+            <a:endParaRPr lang="ko-KR" altLang="en-US"/>
+          </a:p>
+        </p:txBody>
       </p:sp>
       <p:sp>
         <p:nvSpPr>
@@ -3969,6 +4179,13 @@
             <a:prstDash val="solid"/>
           </a:ln>
         </p:spPr>
+        <p:txBody>
+          <a:bodyPr/>
+          <a:lstStyle/>
+          <a:p>
+            <a:endParaRPr lang="ko-KR" altLang="en-US"/>
+          </a:p>
+        </p:txBody>
       </p:sp>
       <p:sp>
         <p:nvSpPr>
@@ -4122,6 +4339,13 @@
             </a:outerShdw>
           </a:effectLst>
         </p:spPr>
+        <p:txBody>
+          <a:bodyPr/>
+          <a:lstStyle/>
+          <a:p>
+            <a:endParaRPr lang="ko-KR" altLang="en-US"/>
+          </a:p>
+        </p:txBody>
       </p:sp>
       <p:sp>
         <p:nvSpPr>
@@ -4144,6 +4368,13 @@
           </a:solidFill>
           <a:ln/>
         </p:spPr>
+        <p:txBody>
+          <a:bodyPr/>
+          <a:lstStyle/>
+          <a:p>
+            <a:endParaRPr lang="ko-KR" altLang="en-US"/>
+          </a:p>
+        </p:txBody>
       </p:sp>
       <p:sp>
         <p:nvSpPr>
@@ -4164,6 +4395,13 @@
           </a:solidFill>
           <a:ln/>
         </p:spPr>
+        <p:txBody>
+          <a:bodyPr/>
+          <a:lstStyle/>
+          <a:p>
+            <a:endParaRPr lang="ko-KR" altLang="en-US"/>
+          </a:p>
+        </p:txBody>
       </p:sp>
       <p:sp>
         <p:nvSpPr>
@@ -4184,6 +4422,13 @@
           </a:solidFill>
           <a:ln/>
         </p:spPr>
+        <p:txBody>
+          <a:bodyPr/>
+          <a:lstStyle/>
+          <a:p>
+            <a:endParaRPr lang="ko-KR" altLang="en-US"/>
+          </a:p>
+        </p:txBody>
       </p:sp>
       <p:sp>
         <p:nvSpPr>
@@ -4204,6 +4449,13 @@
           </a:solidFill>
           <a:ln/>
         </p:spPr>
+        <p:txBody>
+          <a:bodyPr/>
+          <a:lstStyle/>
+          <a:p>
+            <a:endParaRPr lang="ko-KR" altLang="en-US"/>
+          </a:p>
+        </p:txBody>
       </p:sp>
       <p:sp>
         <p:nvSpPr>
@@ -4224,6 +4476,13 @@
           </a:solidFill>
           <a:ln/>
         </p:spPr>
+        <p:txBody>
+          <a:bodyPr/>
+          <a:lstStyle/>
+          <a:p>
+            <a:endParaRPr lang="ko-KR" altLang="en-US"/>
+          </a:p>
+        </p:txBody>
       </p:sp>
       <p:sp>
         <p:nvSpPr>
@@ -4594,6 +4853,13 @@
             <a:prstDash val="solid"/>
           </a:ln>
         </p:spPr>
+        <p:txBody>
+          <a:bodyPr/>
+          <a:lstStyle/>
+          <a:p>
+            <a:endParaRPr lang="ko-KR" altLang="en-US"/>
+          </a:p>
+        </p:txBody>
       </p:sp>
       <p:sp>
         <p:nvSpPr>
@@ -4747,6 +5013,13 @@
             </a:outerShdw>
           </a:effectLst>
         </p:spPr>
+        <p:txBody>
+          <a:bodyPr/>
+          <a:lstStyle/>
+          <a:p>
+            <a:endParaRPr lang="ko-KR" altLang="en-US"/>
+          </a:p>
+        </p:txBody>
       </p:sp>
       <p:sp>
         <p:nvSpPr>
@@ -4769,6 +5042,13 @@
           </a:solidFill>
           <a:ln/>
         </p:spPr>
+        <p:txBody>
+          <a:bodyPr/>
+          <a:lstStyle/>
+          <a:p>
+            <a:endParaRPr lang="ko-KR" altLang="en-US"/>
+          </a:p>
+        </p:txBody>
       </p:sp>
       <p:sp>
         <p:nvSpPr>
@@ -4789,6 +5069,13 @@
           </a:solidFill>
           <a:ln/>
         </p:spPr>
+        <p:txBody>
+          <a:bodyPr/>
+          <a:lstStyle/>
+          <a:p>
+            <a:endParaRPr lang="ko-KR" altLang="en-US"/>
+          </a:p>
+        </p:txBody>
       </p:sp>
       <p:sp>
         <p:nvSpPr>
@@ -4809,6 +5096,13 @@
           </a:solidFill>
           <a:ln/>
         </p:spPr>
+        <p:txBody>
+          <a:bodyPr/>
+          <a:lstStyle/>
+          <a:p>
+            <a:endParaRPr lang="ko-KR" altLang="en-US"/>
+          </a:p>
+        </p:txBody>
       </p:sp>
       <p:sp>
         <p:nvSpPr>
@@ -4829,6 +5123,13 @@
           </a:solidFill>
           <a:ln/>
         </p:spPr>
+        <p:txBody>
+          <a:bodyPr/>
+          <a:lstStyle/>
+          <a:p>
+            <a:endParaRPr lang="ko-KR" altLang="en-US"/>
+          </a:p>
+        </p:txBody>
       </p:sp>
       <p:sp>
         <p:nvSpPr>
@@ -4849,6 +5150,13 @@
           </a:solidFill>
           <a:ln/>
         </p:spPr>
+        <p:txBody>
+          <a:bodyPr/>
+          <a:lstStyle/>
+          <a:p>
+            <a:endParaRPr lang="ko-KR" altLang="en-US"/>
+          </a:p>
+        </p:txBody>
       </p:sp>
       <p:sp>
         <p:nvSpPr>
@@ -5179,6 +5487,13 @@
             <a:prstDash val="solid"/>
           </a:ln>
         </p:spPr>
+        <p:txBody>
+          <a:bodyPr/>
+          <a:lstStyle/>
+          <a:p>
+            <a:endParaRPr lang="ko-KR" altLang="en-US"/>
+          </a:p>
+        </p:txBody>
       </p:sp>
       <p:sp>
         <p:nvSpPr>
@@ -5286,6 +5601,13 @@
             </a:outerShdw>
           </a:effectLst>
         </p:spPr>
+        <p:txBody>
+          <a:bodyPr/>
+          <a:lstStyle/>
+          <a:p>
+            <a:endParaRPr lang="ko-KR" altLang="en-US"/>
+          </a:p>
+        </p:txBody>
       </p:sp>
       <p:sp>
         <p:nvSpPr>
@@ -5308,6 +5630,13 @@
           </a:solidFill>
           <a:ln/>
         </p:spPr>
+        <p:txBody>
+          <a:bodyPr/>
+          <a:lstStyle/>
+          <a:p>
+            <a:endParaRPr lang="ko-KR" altLang="en-US"/>
+          </a:p>
+        </p:txBody>
       </p:sp>
       <p:sp>
         <p:nvSpPr>
@@ -5328,6 +5657,13 @@
           </a:solidFill>
           <a:ln/>
         </p:spPr>
+        <p:txBody>
+          <a:bodyPr/>
+          <a:lstStyle/>
+          <a:p>
+            <a:endParaRPr lang="ko-KR" altLang="en-US"/>
+          </a:p>
+        </p:txBody>
       </p:sp>
       <p:sp>
         <p:nvSpPr>
@@ -5348,6 +5684,13 @@
           </a:solidFill>
           <a:ln/>
         </p:spPr>
+        <p:txBody>
+          <a:bodyPr/>
+          <a:lstStyle/>
+          <a:p>
+            <a:endParaRPr lang="ko-KR" altLang="en-US"/>
+          </a:p>
+        </p:txBody>
       </p:sp>
       <p:sp>
         <p:nvSpPr>
@@ -5368,6 +5711,13 @@
           </a:solidFill>
           <a:ln/>
         </p:spPr>
+        <p:txBody>
+          <a:bodyPr/>
+          <a:lstStyle/>
+          <a:p>
+            <a:endParaRPr lang="ko-KR" altLang="en-US"/>
+          </a:p>
+        </p:txBody>
       </p:sp>
       <p:sp>
         <p:nvSpPr>
@@ -5388,6 +5738,13 @@
           </a:solidFill>
           <a:ln/>
         </p:spPr>
+        <p:txBody>
+          <a:bodyPr/>
+          <a:lstStyle/>
+          <a:p>
+            <a:endParaRPr lang="ko-KR" altLang="en-US"/>
+          </a:p>
+        </p:txBody>
       </p:sp>
       <p:sp>
         <p:nvSpPr>
@@ -5789,6 +6146,13 @@
             <a:prstDash val="solid"/>
           </a:ln>
         </p:spPr>
+        <p:txBody>
+          <a:bodyPr/>
+          <a:lstStyle/>
+          <a:p>
+            <a:endParaRPr lang="ko-KR" altLang="en-US"/>
+          </a:p>
+        </p:txBody>
       </p:sp>
       <p:sp>
         <p:nvSpPr>
@@ -6059,6 +6423,13 @@
             </a:outerShdw>
           </a:effectLst>
         </p:spPr>
+        <p:txBody>
+          <a:bodyPr/>
+          <a:lstStyle/>
+          <a:p>
+            <a:endParaRPr lang="ko-KR" altLang="en-US"/>
+          </a:p>
+        </p:txBody>
       </p:sp>
       <p:sp>
         <p:nvSpPr>
@@ -6081,6 +6452,13 @@
           </a:solidFill>
           <a:ln/>
         </p:spPr>
+        <p:txBody>
+          <a:bodyPr/>
+          <a:lstStyle/>
+          <a:p>
+            <a:endParaRPr lang="ko-KR" altLang="en-US"/>
+          </a:p>
+        </p:txBody>
       </p:sp>
       <p:sp>
         <p:nvSpPr>
@@ -6101,6 +6479,13 @@
           </a:solidFill>
           <a:ln/>
         </p:spPr>
+        <p:txBody>
+          <a:bodyPr/>
+          <a:lstStyle/>
+          <a:p>
+            <a:endParaRPr lang="ko-KR" altLang="en-US"/>
+          </a:p>
+        </p:txBody>
       </p:sp>
       <p:sp>
         <p:nvSpPr>
@@ -6121,6 +6506,13 @@
           </a:solidFill>
           <a:ln/>
         </p:spPr>
+        <p:txBody>
+          <a:bodyPr/>
+          <a:lstStyle/>
+          <a:p>
+            <a:endParaRPr lang="ko-KR" altLang="en-US"/>
+          </a:p>
+        </p:txBody>
       </p:sp>
       <p:sp>
         <p:nvSpPr>
@@ -6141,6 +6533,13 @@
           </a:solidFill>
           <a:ln/>
         </p:spPr>
+        <p:txBody>
+          <a:bodyPr/>
+          <a:lstStyle/>
+          <a:p>
+            <a:endParaRPr lang="ko-KR" altLang="en-US"/>
+          </a:p>
+        </p:txBody>
       </p:sp>
       <p:sp>
         <p:nvSpPr>
@@ -6161,6 +6560,13 @@
           </a:solidFill>
           <a:ln/>
         </p:spPr>
+        <p:txBody>
+          <a:bodyPr/>
+          <a:lstStyle/>
+          <a:p>
+            <a:endParaRPr lang="ko-KR" altLang="en-US"/>
+          </a:p>
+        </p:txBody>
       </p:sp>
       <p:sp>
         <p:nvSpPr>
@@ -6442,6 +6848,13 @@
             <a:prstDash val="solid"/>
           </a:ln>
         </p:spPr>
+        <p:txBody>
+          <a:bodyPr/>
+          <a:lstStyle/>
+          <a:p>
+            <a:endParaRPr lang="ko-KR" altLang="en-US"/>
+          </a:p>
+        </p:txBody>
       </p:sp>
       <p:sp>
         <p:nvSpPr>
@@ -6595,6 +7008,13 @@
             </a:outerShdw>
           </a:effectLst>
         </p:spPr>
+        <p:txBody>
+          <a:bodyPr/>
+          <a:lstStyle/>
+          <a:p>
+            <a:endParaRPr lang="ko-KR" altLang="en-US"/>
+          </a:p>
+        </p:txBody>
       </p:sp>
       <p:sp>
         <p:nvSpPr>
@@ -6617,6 +7037,13 @@
           </a:solidFill>
           <a:ln/>
         </p:spPr>
+        <p:txBody>
+          <a:bodyPr/>
+          <a:lstStyle/>
+          <a:p>
+            <a:endParaRPr lang="ko-KR" altLang="en-US"/>
+          </a:p>
+        </p:txBody>
       </p:sp>
       <p:sp>
         <p:nvSpPr>
@@ -6637,6 +7064,13 @@
           </a:solidFill>
           <a:ln/>
         </p:spPr>
+        <p:txBody>
+          <a:bodyPr/>
+          <a:lstStyle/>
+          <a:p>
+            <a:endParaRPr lang="ko-KR" altLang="en-US"/>
+          </a:p>
+        </p:txBody>
       </p:sp>
       <p:sp>
         <p:nvSpPr>
@@ -6657,6 +7091,13 @@
           </a:solidFill>
           <a:ln/>
         </p:spPr>
+        <p:txBody>
+          <a:bodyPr/>
+          <a:lstStyle/>
+          <a:p>
+            <a:endParaRPr lang="ko-KR" altLang="en-US"/>
+          </a:p>
+        </p:txBody>
       </p:sp>
       <p:sp>
         <p:nvSpPr>
@@ -6677,6 +7118,13 @@
           </a:solidFill>
           <a:ln/>
         </p:spPr>
+        <p:txBody>
+          <a:bodyPr/>
+          <a:lstStyle/>
+          <a:p>
+            <a:endParaRPr lang="ko-KR" altLang="en-US"/>
+          </a:p>
+        </p:txBody>
       </p:sp>
       <p:sp>
         <p:nvSpPr>
@@ -6697,6 +7145,13 @@
           </a:solidFill>
           <a:ln/>
         </p:spPr>
+        <p:txBody>
+          <a:bodyPr/>
+          <a:lstStyle/>
+          <a:p>
+            <a:endParaRPr lang="ko-KR" altLang="en-US"/>
+          </a:p>
+        </p:txBody>
       </p:sp>
       <p:sp>
         <p:nvSpPr>
@@ -6816,6 +7271,13 @@
             <a:prstDash val="solid"/>
           </a:ln>
         </p:spPr>
+        <p:txBody>
+          <a:bodyPr/>
+          <a:lstStyle/>
+          <a:p>
+            <a:endParaRPr lang="ko-KR" altLang="en-US"/>
+          </a:p>
+        </p:txBody>
       </p:sp>
       <p:sp>
         <p:nvSpPr>
@@ -6838,6 +7300,13 @@
           </a:solidFill>
           <a:ln/>
         </p:spPr>
+        <p:txBody>
+          <a:bodyPr/>
+          <a:lstStyle/>
+          <a:p>
+            <a:endParaRPr lang="ko-KR" altLang="en-US"/>
+          </a:p>
+        </p:txBody>
       </p:sp>
       <p:sp>
         <p:nvSpPr>
@@ -6985,6 +7454,13 @@
             <a:prstDash val="solid"/>
           </a:ln>
         </p:spPr>
+        <p:txBody>
+          <a:bodyPr/>
+          <a:lstStyle/>
+          <a:p>
+            <a:endParaRPr lang="ko-KR" altLang="en-US"/>
+          </a:p>
+        </p:txBody>
       </p:sp>
       <p:sp>
         <p:nvSpPr>
@@ -7007,6 +7483,13 @@
           </a:solidFill>
           <a:ln/>
         </p:spPr>
+        <p:txBody>
+          <a:bodyPr/>
+          <a:lstStyle/>
+          <a:p>
+            <a:endParaRPr lang="ko-KR" altLang="en-US"/>
+          </a:p>
+        </p:txBody>
       </p:sp>
       <p:sp>
         <p:nvSpPr>
@@ -7274,6 +7757,13 @@
             <a:prstDash val="solid"/>
           </a:ln>
         </p:spPr>
+        <p:txBody>
+          <a:bodyPr/>
+          <a:lstStyle/>
+          <a:p>
+            <a:endParaRPr lang="ko-KR" altLang="en-US"/>
+          </a:p>
+        </p:txBody>
       </p:sp>
       <p:sp>
         <p:nvSpPr>
@@ -7381,6 +7871,13 @@
             </a:outerShdw>
           </a:effectLst>
         </p:spPr>
+        <p:txBody>
+          <a:bodyPr/>
+          <a:lstStyle/>
+          <a:p>
+            <a:endParaRPr lang="ko-KR" altLang="en-US"/>
+          </a:p>
+        </p:txBody>
       </p:sp>
       <p:sp>
         <p:nvSpPr>
@@ -7403,6 +7900,13 @@
           </a:solidFill>
           <a:ln/>
         </p:spPr>
+        <p:txBody>
+          <a:bodyPr/>
+          <a:lstStyle/>
+          <a:p>
+            <a:endParaRPr lang="ko-KR" altLang="en-US"/>
+          </a:p>
+        </p:txBody>
       </p:sp>
       <p:sp>
         <p:nvSpPr>
@@ -7423,6 +7927,13 @@
           </a:solidFill>
           <a:ln/>
         </p:spPr>
+        <p:txBody>
+          <a:bodyPr/>
+          <a:lstStyle/>
+          <a:p>
+            <a:endParaRPr lang="ko-KR" altLang="en-US"/>
+          </a:p>
+        </p:txBody>
       </p:sp>
       <p:sp>
         <p:nvSpPr>
@@ -7443,6 +7954,13 @@
           </a:solidFill>
           <a:ln/>
         </p:spPr>
+        <p:txBody>
+          <a:bodyPr/>
+          <a:lstStyle/>
+          <a:p>
+            <a:endParaRPr lang="ko-KR" altLang="en-US"/>
+          </a:p>
+        </p:txBody>
       </p:sp>
       <p:sp>
         <p:nvSpPr>
@@ -7463,6 +7981,13 @@
           </a:solidFill>
           <a:ln/>
         </p:spPr>
+        <p:txBody>
+          <a:bodyPr/>
+          <a:lstStyle/>
+          <a:p>
+            <a:endParaRPr lang="ko-KR" altLang="en-US"/>
+          </a:p>
+        </p:txBody>
       </p:sp>
       <p:sp>
         <p:nvSpPr>
@@ -7483,6 +8008,13 @@
           </a:solidFill>
           <a:ln/>
         </p:spPr>
+        <p:txBody>
+          <a:bodyPr/>
+          <a:lstStyle/>
+          <a:p>
+            <a:endParaRPr lang="ko-KR" altLang="en-US"/>
+          </a:p>
+        </p:txBody>
       </p:sp>
       <p:sp>
         <p:nvSpPr>
@@ -7624,6 +8156,13 @@
             </a:outerShdw>
           </a:effectLst>
         </p:spPr>
+        <p:txBody>
+          <a:bodyPr/>
+          <a:lstStyle/>
+          <a:p>
+            <a:endParaRPr lang="ko-KR" altLang="en-US"/>
+          </a:p>
+        </p:txBody>
       </p:sp>
       <p:sp>
         <p:nvSpPr>
@@ -7646,6 +8185,13 @@
           </a:solidFill>
           <a:ln/>
         </p:spPr>
+        <p:txBody>
+          <a:bodyPr/>
+          <a:lstStyle/>
+          <a:p>
+            <a:endParaRPr lang="ko-KR" altLang="en-US"/>
+          </a:p>
+        </p:txBody>
       </p:sp>
       <p:sp>
         <p:nvSpPr>
@@ -7666,6 +8212,13 @@
           </a:solidFill>
           <a:ln/>
         </p:spPr>
+        <p:txBody>
+          <a:bodyPr/>
+          <a:lstStyle/>
+          <a:p>
+            <a:endParaRPr lang="ko-KR" altLang="en-US"/>
+          </a:p>
+        </p:txBody>
       </p:sp>
       <p:sp>
         <p:nvSpPr>
@@ -7686,6 +8239,13 @@
           </a:solidFill>
           <a:ln/>
         </p:spPr>
+        <p:txBody>
+          <a:bodyPr/>
+          <a:lstStyle/>
+          <a:p>
+            <a:endParaRPr lang="ko-KR" altLang="en-US"/>
+          </a:p>
+        </p:txBody>
       </p:sp>
       <p:sp>
         <p:nvSpPr>
@@ -7706,6 +8266,13 @@
           </a:solidFill>
           <a:ln/>
         </p:spPr>
+        <p:txBody>
+          <a:bodyPr/>
+          <a:lstStyle/>
+          <a:p>
+            <a:endParaRPr lang="ko-KR" altLang="en-US"/>
+          </a:p>
+        </p:txBody>
       </p:sp>
       <p:sp>
         <p:nvSpPr>
@@ -7726,6 +8293,13 @@
           </a:solidFill>
           <a:ln/>
         </p:spPr>
+        <p:txBody>
+          <a:bodyPr/>
+          <a:lstStyle/>
+          <a:p>
+            <a:endParaRPr lang="ko-KR" altLang="en-US"/>
+          </a:p>
+        </p:txBody>
       </p:sp>
       <p:sp>
         <p:nvSpPr>
@@ -7867,6 +8441,13 @@
             </a:outerShdw>
           </a:effectLst>
         </p:spPr>
+        <p:txBody>
+          <a:bodyPr/>
+          <a:lstStyle/>
+          <a:p>
+            <a:endParaRPr lang="ko-KR" altLang="en-US"/>
+          </a:p>
+        </p:txBody>
       </p:sp>
       <p:sp>
         <p:nvSpPr>
@@ -7889,6 +8470,13 @@
           </a:solidFill>
           <a:ln/>
         </p:spPr>
+        <p:txBody>
+          <a:bodyPr/>
+          <a:lstStyle/>
+          <a:p>
+            <a:endParaRPr lang="ko-KR" altLang="en-US"/>
+          </a:p>
+        </p:txBody>
       </p:sp>
       <p:sp>
         <p:nvSpPr>
@@ -7909,6 +8497,13 @@
           </a:solidFill>
           <a:ln/>
         </p:spPr>
+        <p:txBody>
+          <a:bodyPr/>
+          <a:lstStyle/>
+          <a:p>
+            <a:endParaRPr lang="ko-KR" altLang="en-US"/>
+          </a:p>
+        </p:txBody>
       </p:sp>
       <p:sp>
         <p:nvSpPr>
@@ -7929,6 +8524,13 @@
           </a:solidFill>
           <a:ln/>
         </p:spPr>
+        <p:txBody>
+          <a:bodyPr/>
+          <a:lstStyle/>
+          <a:p>
+            <a:endParaRPr lang="ko-KR" altLang="en-US"/>
+          </a:p>
+        </p:txBody>
       </p:sp>
       <p:sp>
         <p:nvSpPr>
@@ -7949,6 +8551,13 @@
           </a:solidFill>
           <a:ln/>
         </p:spPr>
+        <p:txBody>
+          <a:bodyPr/>
+          <a:lstStyle/>
+          <a:p>
+            <a:endParaRPr lang="ko-KR" altLang="en-US"/>
+          </a:p>
+        </p:txBody>
       </p:sp>
       <p:sp>
         <p:nvSpPr>
@@ -7969,6 +8578,13 @@
           </a:solidFill>
           <a:ln/>
         </p:spPr>
+        <p:txBody>
+          <a:bodyPr/>
+          <a:lstStyle/>
+          <a:p>
+            <a:endParaRPr lang="ko-KR" altLang="en-US"/>
+          </a:p>
+        </p:txBody>
       </p:sp>
       <p:sp>
         <p:nvSpPr>
@@ -8219,6 +8835,13 @@
             <a:prstDash val="solid"/>
           </a:ln>
         </p:spPr>
+        <p:txBody>
+          <a:bodyPr/>
+          <a:lstStyle/>
+          <a:p>
+            <a:endParaRPr lang="ko-KR" altLang="en-US"/>
+          </a:p>
+        </p:txBody>
       </p:sp>
       <p:sp>
         <p:nvSpPr>
@@ -8372,6 +8995,13 @@
             </a:outerShdw>
           </a:effectLst>
         </p:spPr>
+        <p:txBody>
+          <a:bodyPr/>
+          <a:lstStyle/>
+          <a:p>
+            <a:endParaRPr lang="ko-KR" altLang="en-US"/>
+          </a:p>
+        </p:txBody>
       </p:sp>
       <p:sp>
         <p:nvSpPr>
@@ -8394,6 +9024,13 @@
           </a:solidFill>
           <a:ln/>
         </p:spPr>
+        <p:txBody>
+          <a:bodyPr/>
+          <a:lstStyle/>
+          <a:p>
+            <a:endParaRPr lang="ko-KR" altLang="en-US"/>
+          </a:p>
+        </p:txBody>
       </p:sp>
       <p:sp>
         <p:nvSpPr>
@@ -8414,6 +9051,13 @@
           </a:solidFill>
           <a:ln/>
         </p:spPr>
+        <p:txBody>
+          <a:bodyPr/>
+          <a:lstStyle/>
+          <a:p>
+            <a:endParaRPr lang="ko-KR" altLang="en-US"/>
+          </a:p>
+        </p:txBody>
       </p:sp>
       <p:sp>
         <p:nvSpPr>
@@ -8434,6 +9078,13 @@
           </a:solidFill>
           <a:ln/>
         </p:spPr>
+        <p:txBody>
+          <a:bodyPr/>
+          <a:lstStyle/>
+          <a:p>
+            <a:endParaRPr lang="ko-KR" altLang="en-US"/>
+          </a:p>
+        </p:txBody>
       </p:sp>
       <p:sp>
         <p:nvSpPr>
@@ -8454,6 +9105,13 @@
           </a:solidFill>
           <a:ln/>
         </p:spPr>
+        <p:txBody>
+          <a:bodyPr/>
+          <a:lstStyle/>
+          <a:p>
+            <a:endParaRPr lang="ko-KR" altLang="en-US"/>
+          </a:p>
+        </p:txBody>
       </p:sp>
       <p:sp>
         <p:nvSpPr>
@@ -8474,6 +9132,13 @@
           </a:solidFill>
           <a:ln/>
         </p:spPr>
+        <p:txBody>
+          <a:bodyPr/>
+          <a:lstStyle/>
+          <a:p>
+            <a:endParaRPr lang="ko-KR" altLang="en-US"/>
+          </a:p>
+        </p:txBody>
       </p:sp>
       <p:sp>
         <p:nvSpPr>
@@ -8704,6 +9369,13 @@
             <a:prstDash val="solid"/>
           </a:ln>
         </p:spPr>
+        <p:txBody>
+          <a:bodyPr/>
+          <a:lstStyle/>
+          <a:p>
+            <a:endParaRPr lang="ko-KR" altLang="en-US"/>
+          </a:p>
+        </p:txBody>
       </p:sp>
       <p:sp>
         <p:nvSpPr>
@@ -8809,6 +9481,13 @@
             </a:outerShdw>
           </a:effectLst>
         </p:spPr>
+        <p:txBody>
+          <a:bodyPr/>
+          <a:lstStyle/>
+          <a:p>
+            <a:endParaRPr lang="ko-KR" altLang="en-US"/>
+          </a:p>
+        </p:txBody>
       </p:sp>
       <p:sp>
         <p:nvSpPr>
@@ -8958,6 +9637,13 @@
             </a:outerShdw>
           </a:effectLst>
         </p:spPr>
+        <p:txBody>
+          <a:bodyPr/>
+          <a:lstStyle/>
+          <a:p>
+            <a:endParaRPr lang="ko-KR" altLang="en-US"/>
+          </a:p>
+        </p:txBody>
       </p:sp>
       <p:sp>
         <p:nvSpPr>
@@ -9038,6 +9724,13 @@
             </a:outerShdw>
           </a:effectLst>
         </p:spPr>
+        <p:txBody>
+          <a:bodyPr/>
+          <a:lstStyle/>
+          <a:p>
+            <a:endParaRPr lang="ko-KR" altLang="en-US"/>
+          </a:p>
+        </p:txBody>
       </p:sp>
       <p:sp>
         <p:nvSpPr>
@@ -9187,6 +9880,13 @@
             </a:outerShdw>
           </a:effectLst>
         </p:spPr>
+        <p:txBody>
+          <a:bodyPr/>
+          <a:lstStyle/>
+          <a:p>
+            <a:endParaRPr lang="ko-KR" altLang="en-US"/>
+          </a:p>
+        </p:txBody>
       </p:sp>
       <p:sp>
         <p:nvSpPr>
@@ -9267,6 +9967,13 @@
             </a:outerShdw>
           </a:effectLst>
         </p:spPr>
+        <p:txBody>
+          <a:bodyPr/>
+          <a:lstStyle/>
+          <a:p>
+            <a:endParaRPr lang="ko-KR" altLang="en-US"/>
+          </a:p>
+        </p:txBody>
       </p:sp>
       <p:sp>
         <p:nvSpPr>
@@ -9416,6 +10123,13 @@
             </a:outerShdw>
           </a:effectLst>
         </p:spPr>
+        <p:txBody>
+          <a:bodyPr/>
+          <a:lstStyle/>
+          <a:p>
+            <a:endParaRPr lang="ko-KR" altLang="en-US"/>
+          </a:p>
+        </p:txBody>
       </p:sp>
       <p:sp>
         <p:nvSpPr>
@@ -9638,6 +10352,13 @@
             <a:prstDash val="solid"/>
           </a:ln>
         </p:spPr>
+        <p:txBody>
+          <a:bodyPr/>
+          <a:lstStyle/>
+          <a:p>
+            <a:endParaRPr lang="ko-KR" altLang="en-US"/>
+          </a:p>
+        </p:txBody>
       </p:sp>
       <p:sp>
         <p:nvSpPr>
@@ -9813,6 +10534,13 @@
             <a:prstDash val="solid"/>
           </a:ln>
         </p:spPr>
+        <p:txBody>
+          <a:bodyPr/>
+          <a:lstStyle/>
+          <a:p>
+            <a:endParaRPr lang="ko-KR" altLang="en-US"/>
+          </a:p>
+        </p:txBody>
       </p:sp>
       <p:sp>
         <p:nvSpPr>
@@ -9835,6 +10563,13 @@
           </a:solidFill>
           <a:ln/>
         </p:spPr>
+        <p:txBody>
+          <a:bodyPr/>
+          <a:lstStyle/>
+          <a:p>
+            <a:endParaRPr lang="ko-KR" altLang="en-US"/>
+          </a:p>
+        </p:txBody>
       </p:sp>
       <p:sp>
         <p:nvSpPr>
@@ -9901,6 +10636,13 @@
             <a:prstDash val="solid"/>
           </a:ln>
         </p:spPr>
+        <p:txBody>
+          <a:bodyPr/>
+          <a:lstStyle/>
+          <a:p>
+            <a:endParaRPr lang="ko-KR" altLang="en-US"/>
+          </a:p>
+        </p:txBody>
       </p:sp>
       <p:sp>
         <p:nvSpPr>
@@ -9967,6 +10709,13 @@
             <a:prstDash val="solid"/>
           </a:ln>
         </p:spPr>
+        <p:txBody>
+          <a:bodyPr/>
+          <a:lstStyle/>
+          <a:p>
+            <a:endParaRPr lang="ko-KR" altLang="en-US"/>
+          </a:p>
+        </p:txBody>
       </p:sp>
       <p:sp>
         <p:nvSpPr>
@@ -10033,6 +10782,13 @@
             <a:prstDash val="solid"/>
           </a:ln>
         </p:spPr>
+        <p:txBody>
+          <a:bodyPr/>
+          <a:lstStyle/>
+          <a:p>
+            <a:endParaRPr lang="ko-KR" altLang="en-US"/>
+          </a:p>
+        </p:txBody>
       </p:sp>
       <p:sp>
         <p:nvSpPr>
@@ -10099,6 +10855,13 @@
             <a:prstDash val="solid"/>
           </a:ln>
         </p:spPr>
+        <p:txBody>
+          <a:bodyPr/>
+          <a:lstStyle/>
+          <a:p>
+            <a:endParaRPr lang="ko-KR" altLang="en-US"/>
+          </a:p>
+        </p:txBody>
       </p:sp>
       <p:sp>
         <p:nvSpPr>
@@ -10165,6 +10928,13 @@
             <a:prstDash val="solid"/>
           </a:ln>
         </p:spPr>
+        <p:txBody>
+          <a:bodyPr/>
+          <a:lstStyle/>
+          <a:p>
+            <a:endParaRPr lang="ko-KR" altLang="en-US"/>
+          </a:p>
+        </p:txBody>
       </p:sp>
       <p:sp>
         <p:nvSpPr>
@@ -10429,6 +11199,13 @@
             </a:outerShdw>
           </a:effectLst>
         </p:spPr>
+        <p:txBody>
+          <a:bodyPr/>
+          <a:lstStyle/>
+          <a:p>
+            <a:endParaRPr lang="ko-KR" altLang="en-US"/>
+          </a:p>
+        </p:txBody>
       </p:sp>
       <p:sp>
         <p:nvSpPr>
@@ -10451,6 +11228,13 @@
           </a:solidFill>
           <a:ln/>
         </p:spPr>
+        <p:txBody>
+          <a:bodyPr/>
+          <a:lstStyle/>
+          <a:p>
+            <a:endParaRPr lang="ko-KR" altLang="en-US"/>
+          </a:p>
+        </p:txBody>
       </p:sp>
       <p:sp>
         <p:nvSpPr>
@@ -10471,6 +11255,13 @@
           </a:solidFill>
           <a:ln/>
         </p:spPr>
+        <p:txBody>
+          <a:bodyPr/>
+          <a:lstStyle/>
+          <a:p>
+            <a:endParaRPr lang="ko-KR" altLang="en-US"/>
+          </a:p>
+        </p:txBody>
       </p:sp>
       <p:sp>
         <p:nvSpPr>
@@ -10491,6 +11282,13 @@
           </a:solidFill>
           <a:ln/>
         </p:spPr>
+        <p:txBody>
+          <a:bodyPr/>
+          <a:lstStyle/>
+          <a:p>
+            <a:endParaRPr lang="ko-KR" altLang="en-US"/>
+          </a:p>
+        </p:txBody>
       </p:sp>
       <p:sp>
         <p:nvSpPr>
@@ -10511,6 +11309,13 @@
           </a:solidFill>
           <a:ln/>
         </p:spPr>
+        <p:txBody>
+          <a:bodyPr/>
+          <a:lstStyle/>
+          <a:p>
+            <a:endParaRPr lang="ko-KR" altLang="en-US"/>
+          </a:p>
+        </p:txBody>
       </p:sp>
       <p:sp>
         <p:nvSpPr>
@@ -10531,6 +11336,13 @@
           </a:solidFill>
           <a:ln/>
         </p:spPr>
+        <p:txBody>
+          <a:bodyPr/>
+          <a:lstStyle/>
+          <a:p>
+            <a:endParaRPr lang="ko-KR" altLang="en-US"/>
+          </a:p>
+        </p:txBody>
       </p:sp>
       <p:sp>
         <p:nvSpPr>
@@ -10650,6 +11462,13 @@
             <a:prstDash val="solid"/>
           </a:ln>
         </p:spPr>
+        <p:txBody>
+          <a:bodyPr/>
+          <a:lstStyle/>
+          <a:p>
+            <a:endParaRPr lang="ko-KR" altLang="en-US"/>
+          </a:p>
+        </p:txBody>
       </p:sp>
       <p:sp>
         <p:nvSpPr>
@@ -10672,6 +11491,13 @@
           </a:solidFill>
           <a:ln/>
         </p:spPr>
+        <p:txBody>
+          <a:bodyPr/>
+          <a:lstStyle/>
+          <a:p>
+            <a:endParaRPr lang="ko-KR" altLang="en-US"/>
+          </a:p>
+        </p:txBody>
       </p:sp>
       <p:sp>
         <p:nvSpPr>
@@ -11133,6 +11959,13 @@
             <a:prstDash val="solid"/>
           </a:ln>
         </p:spPr>
+        <p:txBody>
+          <a:bodyPr/>
+          <a:lstStyle/>
+          <a:p>
+            <a:endParaRPr lang="ko-KR" altLang="en-US"/>
+          </a:p>
+        </p:txBody>
       </p:sp>
       <p:sp>
         <p:nvSpPr>
@@ -11222,6 +12055,13 @@
             <a:prstDash val="solid"/>
           </a:ln>
         </p:spPr>
+        <p:txBody>
+          <a:bodyPr/>
+          <a:lstStyle/>
+          <a:p>
+            <a:endParaRPr lang="ko-KR" altLang="en-US"/>
+          </a:p>
+        </p:txBody>
       </p:sp>
       <p:sp>
         <p:nvSpPr>
@@ -11350,6 +12190,13 @@
             <a:prstDash val="solid"/>
           </a:ln>
         </p:spPr>
+        <p:txBody>
+          <a:bodyPr/>
+          <a:lstStyle/>
+          <a:p>
+            <a:endParaRPr lang="ko-KR" altLang="en-US"/>
+          </a:p>
+        </p:txBody>
       </p:sp>
       <p:sp>
         <p:nvSpPr>
@@ -11419,6 +12266,13 @@
             <a:prstDash val="solid"/>
           </a:ln>
         </p:spPr>
+        <p:txBody>
+          <a:bodyPr/>
+          <a:lstStyle/>
+          <a:p>
+            <a:endParaRPr lang="ko-KR" altLang="en-US"/>
+          </a:p>
+        </p:txBody>
       </p:sp>
       <p:sp>
         <p:nvSpPr>
@@ -11527,6 +12381,13 @@
             <a:prstDash val="solid"/>
           </a:ln>
         </p:spPr>
+        <p:txBody>
+          <a:bodyPr/>
+          <a:lstStyle/>
+          <a:p>
+            <a:endParaRPr lang="ko-KR" altLang="en-US"/>
+          </a:p>
+        </p:txBody>
       </p:sp>
       <p:sp>
         <p:nvSpPr>
@@ -11596,6 +12457,13 @@
             <a:prstDash val="solid"/>
           </a:ln>
         </p:spPr>
+        <p:txBody>
+          <a:bodyPr/>
+          <a:lstStyle/>
+          <a:p>
+            <a:endParaRPr lang="ko-KR" altLang="en-US"/>
+          </a:p>
+        </p:txBody>
       </p:sp>
       <p:sp>
         <p:nvSpPr>
@@ -11662,6 +12530,13 @@
             <a:tailEnd type="triangle"/>
           </a:ln>
         </p:spPr>
+        <p:txBody>
+          <a:bodyPr/>
+          <a:lstStyle/>
+          <a:p>
+            <a:endParaRPr lang="ko-KR" altLang="en-US"/>
+          </a:p>
+        </p:txBody>
       </p:sp>
       <p:sp>
         <p:nvSpPr>
@@ -11686,6 +12561,13 @@
             <a:tailEnd type="triangle"/>
           </a:ln>
         </p:spPr>
+        <p:txBody>
+          <a:bodyPr/>
+          <a:lstStyle/>
+          <a:p>
+            <a:endParaRPr lang="ko-KR" altLang="en-US"/>
+          </a:p>
+        </p:txBody>
       </p:sp>
       <p:sp>
         <p:nvSpPr>
@@ -11710,6 +12592,13 @@
             <a:tailEnd type="triangle"/>
           </a:ln>
         </p:spPr>
+        <p:txBody>
+          <a:bodyPr/>
+          <a:lstStyle/>
+          <a:p>
+            <a:endParaRPr lang="ko-KR" altLang="en-US"/>
+          </a:p>
+        </p:txBody>
       </p:sp>
       <p:sp>
         <p:nvSpPr>
@@ -11734,6 +12623,13 @@
             <a:tailEnd type="triangle"/>
           </a:ln>
         </p:spPr>
+        <p:txBody>
+          <a:bodyPr/>
+          <a:lstStyle/>
+          <a:p>
+            <a:endParaRPr lang="ko-KR" altLang="en-US"/>
+          </a:p>
+        </p:txBody>
       </p:sp>
       <p:sp>
         <p:nvSpPr>
@@ -11872,6 +12768,13 @@
             <a:prstDash val="solid"/>
           </a:ln>
         </p:spPr>
+        <p:txBody>
+          <a:bodyPr/>
+          <a:lstStyle/>
+          <a:p>
+            <a:endParaRPr lang="ko-KR" altLang="en-US"/>
+          </a:p>
+        </p:txBody>
       </p:sp>
       <p:sp>
         <p:nvSpPr>
@@ -12047,6 +12950,13 @@
             <a:prstDash val="solid"/>
           </a:ln>
         </p:spPr>
+        <p:txBody>
+          <a:bodyPr/>
+          <a:lstStyle/>
+          <a:p>
+            <a:endParaRPr lang="ko-KR" altLang="en-US"/>
+          </a:p>
+        </p:txBody>
       </p:sp>
       <p:sp>
         <p:nvSpPr>
@@ -12069,6 +12979,13 @@
           </a:solidFill>
           <a:ln/>
         </p:spPr>
+        <p:txBody>
+          <a:bodyPr/>
+          <a:lstStyle/>
+          <a:p>
+            <a:endParaRPr lang="ko-KR" altLang="en-US"/>
+          </a:p>
+        </p:txBody>
       </p:sp>
       <p:sp>
         <p:nvSpPr>
@@ -12229,6 +13146,13 @@
             <a:prstDash val="solid"/>
           </a:ln>
         </p:spPr>
+        <p:txBody>
+          <a:bodyPr/>
+          <a:lstStyle/>
+          <a:p>
+            <a:endParaRPr lang="ko-KR" altLang="en-US"/>
+          </a:p>
+        </p:txBody>
       </p:sp>
       <p:sp>
         <p:nvSpPr>
@@ -12251,6 +13175,13 @@
           </a:solidFill>
           <a:ln/>
         </p:spPr>
+        <p:txBody>
+          <a:bodyPr/>
+          <a:lstStyle/>
+          <a:p>
+            <a:endParaRPr lang="ko-KR" altLang="en-US"/>
+          </a:p>
+        </p:txBody>
       </p:sp>
       <p:sp>
         <p:nvSpPr>
@@ -12566,6 +13497,13 @@
             <a:prstDash val="solid"/>
           </a:ln>
         </p:spPr>
+        <p:txBody>
+          <a:bodyPr/>
+          <a:lstStyle/>
+          <a:p>
+            <a:endParaRPr lang="ko-KR" altLang="en-US"/>
+          </a:p>
+        </p:txBody>
       </p:sp>
       <p:sp>
         <p:nvSpPr>
@@ -12588,6 +13526,13 @@
           </a:solidFill>
           <a:ln/>
         </p:spPr>
+        <p:txBody>
+          <a:bodyPr/>
+          <a:lstStyle/>
+          <a:p>
+            <a:endParaRPr lang="ko-KR" altLang="en-US"/>
+          </a:p>
+        </p:txBody>
       </p:sp>
       <p:sp>
         <p:nvSpPr>
@@ -12750,6 +13695,13 @@
             </a:outerShdw>
           </a:effectLst>
         </p:spPr>
+        <p:txBody>
+          <a:bodyPr/>
+          <a:lstStyle/>
+          <a:p>
+            <a:endParaRPr lang="ko-KR" altLang="en-US"/>
+          </a:p>
+        </p:txBody>
       </p:sp>
       <p:sp>
         <p:nvSpPr>
@@ -12772,6 +13724,13 @@
           </a:solidFill>
           <a:ln/>
         </p:spPr>
+        <p:txBody>
+          <a:bodyPr/>
+          <a:lstStyle/>
+          <a:p>
+            <a:endParaRPr lang="ko-KR" altLang="en-US"/>
+          </a:p>
+        </p:txBody>
       </p:sp>
       <p:sp>
         <p:nvSpPr>
@@ -12792,6 +13751,13 @@
           </a:solidFill>
           <a:ln/>
         </p:spPr>
+        <p:txBody>
+          <a:bodyPr/>
+          <a:lstStyle/>
+          <a:p>
+            <a:endParaRPr lang="ko-KR" altLang="en-US"/>
+          </a:p>
+        </p:txBody>
       </p:sp>
       <p:sp>
         <p:nvSpPr>
@@ -12812,6 +13778,13 @@
           </a:solidFill>
           <a:ln/>
         </p:spPr>
+        <p:txBody>
+          <a:bodyPr/>
+          <a:lstStyle/>
+          <a:p>
+            <a:endParaRPr lang="ko-KR" altLang="en-US"/>
+          </a:p>
+        </p:txBody>
       </p:sp>
       <p:sp>
         <p:nvSpPr>
@@ -12832,6 +13805,13 @@
           </a:solidFill>
           <a:ln/>
         </p:spPr>
+        <p:txBody>
+          <a:bodyPr/>
+          <a:lstStyle/>
+          <a:p>
+            <a:endParaRPr lang="ko-KR" altLang="en-US"/>
+          </a:p>
+        </p:txBody>
       </p:sp>
       <p:sp>
         <p:nvSpPr>
@@ -12852,6 +13832,13 @@
           </a:solidFill>
           <a:ln/>
         </p:spPr>
+        <p:txBody>
+          <a:bodyPr/>
+          <a:lstStyle/>
+          <a:p>
+            <a:endParaRPr lang="ko-KR" altLang="en-US"/>
+          </a:p>
+        </p:txBody>
       </p:sp>
       <p:sp>
         <p:nvSpPr>
@@ -13024,6 +14011,13 @@
             </a:outerShdw>
           </a:effectLst>
         </p:spPr>
+        <p:txBody>
+          <a:bodyPr/>
+          <a:lstStyle/>
+          <a:p>
+            <a:endParaRPr lang="ko-KR" altLang="en-US"/>
+          </a:p>
+        </p:txBody>
       </p:sp>
       <p:sp>
         <p:nvSpPr>
@@ -13046,6 +14040,13 @@
           </a:solidFill>
           <a:ln/>
         </p:spPr>
+        <p:txBody>
+          <a:bodyPr/>
+          <a:lstStyle/>
+          <a:p>
+            <a:endParaRPr lang="ko-KR" altLang="en-US"/>
+          </a:p>
+        </p:txBody>
       </p:sp>
       <p:sp>
         <p:nvSpPr>
@@ -13066,6 +14067,13 @@
           </a:solidFill>
           <a:ln/>
         </p:spPr>
+        <p:txBody>
+          <a:bodyPr/>
+          <a:lstStyle/>
+          <a:p>
+            <a:endParaRPr lang="ko-KR" altLang="en-US"/>
+          </a:p>
+        </p:txBody>
       </p:sp>
       <p:sp>
         <p:nvSpPr>
@@ -13086,6 +14094,13 @@
           </a:solidFill>
           <a:ln/>
         </p:spPr>
+        <p:txBody>
+          <a:bodyPr/>
+          <a:lstStyle/>
+          <a:p>
+            <a:endParaRPr lang="ko-KR" altLang="en-US"/>
+          </a:p>
+        </p:txBody>
       </p:sp>
       <p:sp>
         <p:nvSpPr>
@@ -13106,6 +14121,13 @@
           </a:solidFill>
           <a:ln/>
         </p:spPr>
+        <p:txBody>
+          <a:bodyPr/>
+          <a:lstStyle/>
+          <a:p>
+            <a:endParaRPr lang="ko-KR" altLang="en-US"/>
+          </a:p>
+        </p:txBody>
       </p:sp>
       <p:sp>
         <p:nvSpPr>
@@ -13126,6 +14148,13 @@
           </a:solidFill>
           <a:ln/>
         </p:spPr>
+        <p:txBody>
+          <a:bodyPr/>
+          <a:lstStyle/>
+          <a:p>
+            <a:endParaRPr lang="ko-KR" altLang="en-US"/>
+          </a:p>
+        </p:txBody>
       </p:sp>
       <p:sp>
         <p:nvSpPr>
@@ -13296,6 +14325,13 @@
             <a:prstDash val="solid"/>
           </a:ln>
         </p:spPr>
+        <p:txBody>
+          <a:bodyPr/>
+          <a:lstStyle/>
+          <a:p>
+            <a:endParaRPr lang="ko-KR" altLang="en-US"/>
+          </a:p>
+        </p:txBody>
       </p:sp>
       <p:sp>
         <p:nvSpPr>
@@ -13318,6 +14354,13 @@
           </a:solidFill>
           <a:ln/>
         </p:spPr>
+        <p:txBody>
+          <a:bodyPr/>
+          <a:lstStyle/>
+          <a:p>
+            <a:endParaRPr lang="ko-KR" altLang="en-US"/>
+          </a:p>
+        </p:txBody>
       </p:sp>
       <p:sp>
         <p:nvSpPr>
@@ -13662,6 +14705,13 @@
             </a:outerShdw>
           </a:effectLst>
         </p:spPr>
+        <p:txBody>
+          <a:bodyPr/>
+          <a:lstStyle/>
+          <a:p>
+            <a:endParaRPr lang="ko-KR" altLang="en-US"/>
+          </a:p>
+        </p:txBody>
       </p:sp>
       <p:sp>
         <p:nvSpPr>
@@ -13684,6 +14734,13 @@
           </a:solidFill>
           <a:ln/>
         </p:spPr>
+        <p:txBody>
+          <a:bodyPr/>
+          <a:lstStyle/>
+          <a:p>
+            <a:endParaRPr lang="ko-KR" altLang="en-US"/>
+          </a:p>
+        </p:txBody>
       </p:sp>
       <p:sp>
         <p:nvSpPr>
@@ -13704,6 +14761,13 @@
           </a:solidFill>
           <a:ln/>
         </p:spPr>
+        <p:txBody>
+          <a:bodyPr/>
+          <a:lstStyle/>
+          <a:p>
+            <a:endParaRPr lang="ko-KR" altLang="en-US"/>
+          </a:p>
+        </p:txBody>
       </p:sp>
       <p:sp>
         <p:nvSpPr>
@@ -13724,6 +14788,13 @@
           </a:solidFill>
           <a:ln/>
         </p:spPr>
+        <p:txBody>
+          <a:bodyPr/>
+          <a:lstStyle/>
+          <a:p>
+            <a:endParaRPr lang="ko-KR" altLang="en-US"/>
+          </a:p>
+        </p:txBody>
       </p:sp>
       <p:sp>
         <p:nvSpPr>
@@ -13744,6 +14815,13 @@
           </a:solidFill>
           <a:ln/>
         </p:spPr>
+        <p:txBody>
+          <a:bodyPr/>
+          <a:lstStyle/>
+          <a:p>
+            <a:endParaRPr lang="ko-KR" altLang="en-US"/>
+          </a:p>
+        </p:txBody>
       </p:sp>
       <p:sp>
         <p:nvSpPr>
@@ -13764,6 +14842,13 @@
           </a:solidFill>
           <a:ln/>
         </p:spPr>
+        <p:txBody>
+          <a:bodyPr/>
+          <a:lstStyle/>
+          <a:p>
+            <a:endParaRPr lang="ko-KR" altLang="en-US"/>
+          </a:p>
+        </p:txBody>
       </p:sp>
       <p:sp>
         <p:nvSpPr>
@@ -14150,6 +15235,13 @@
             <a:prstDash val="solid"/>
           </a:ln>
         </p:spPr>
+        <p:txBody>
+          <a:bodyPr/>
+          <a:lstStyle/>
+          <a:p>
+            <a:endParaRPr lang="ko-KR" altLang="en-US"/>
+          </a:p>
+        </p:txBody>
       </p:sp>
       <p:sp>
         <p:nvSpPr>
@@ -14373,6 +15465,13 @@
             </a:outerShdw>
           </a:effectLst>
         </p:spPr>
+        <p:txBody>
+          <a:bodyPr/>
+          <a:lstStyle/>
+          <a:p>
+            <a:endParaRPr lang="ko-KR" altLang="en-US"/>
+          </a:p>
+        </p:txBody>
       </p:sp>
       <p:sp>
         <p:nvSpPr>
@@ -14523,6 +15622,13 @@
             </a:outerShdw>
           </a:effectLst>
         </p:spPr>
+        <p:txBody>
+          <a:bodyPr/>
+          <a:lstStyle/>
+          <a:p>
+            <a:endParaRPr lang="ko-KR" altLang="en-US"/>
+          </a:p>
+        </p:txBody>
       </p:sp>
       <p:sp>
         <p:nvSpPr>
@@ -14673,6 +15779,13 @@
             </a:outerShdw>
           </a:effectLst>
         </p:spPr>
+        <p:txBody>
+          <a:bodyPr/>
+          <a:lstStyle/>
+          <a:p>
+            <a:endParaRPr lang="ko-KR" altLang="en-US"/>
+          </a:p>
+        </p:txBody>
       </p:sp>
       <p:sp>
         <p:nvSpPr>
@@ -14823,6 +15936,13 @@
             </a:outerShdw>
           </a:effectLst>
         </p:spPr>
+        <p:txBody>
+          <a:bodyPr/>
+          <a:lstStyle/>
+          <a:p>
+            <a:endParaRPr lang="ko-KR" altLang="en-US"/>
+          </a:p>
+        </p:txBody>
       </p:sp>
       <p:sp>
         <p:nvSpPr>
@@ -14970,6 +16090,13 @@
             <a:tailEnd type="triangle"/>
           </a:ln>
         </p:spPr>
+        <p:txBody>
+          <a:bodyPr/>
+          <a:lstStyle/>
+          <a:p>
+            <a:endParaRPr lang="ko-KR" altLang="en-US"/>
+          </a:p>
+        </p:txBody>
       </p:sp>
       <p:sp>
         <p:nvSpPr>
@@ -14994,6 +16121,13 @@
             <a:tailEnd type="triangle"/>
           </a:ln>
         </p:spPr>
+        <p:txBody>
+          <a:bodyPr/>
+          <a:lstStyle/>
+          <a:p>
+            <a:endParaRPr lang="ko-KR" altLang="en-US"/>
+          </a:p>
+        </p:txBody>
       </p:sp>
       <p:sp>
         <p:nvSpPr>
@@ -15018,6 +16152,13 @@
             <a:tailEnd type="triangle"/>
           </a:ln>
         </p:spPr>
+        <p:txBody>
+          <a:bodyPr/>
+          <a:lstStyle/>
+          <a:p>
+            <a:endParaRPr lang="ko-KR" altLang="en-US"/>
+          </a:p>
+        </p:txBody>
       </p:sp>
       <p:sp>
         <p:nvSpPr>
@@ -15045,6 +16186,13 @@
             <a:prstDash val="solid"/>
           </a:ln>
         </p:spPr>
+        <p:txBody>
+          <a:bodyPr/>
+          <a:lstStyle/>
+          <a:p>
+            <a:endParaRPr lang="ko-KR" altLang="en-US"/>
+          </a:p>
+        </p:txBody>
       </p:sp>
       <p:sp>
         <p:nvSpPr>
@@ -15067,6 +16215,13 @@
           </a:solidFill>
           <a:ln/>
         </p:spPr>
+        <p:txBody>
+          <a:bodyPr/>
+          <a:lstStyle/>
+          <a:p>
+            <a:endParaRPr lang="ko-KR" altLang="en-US"/>
+          </a:p>
+        </p:txBody>
       </p:sp>
       <p:sp>
         <p:nvSpPr>
@@ -15325,6 +16480,13 @@
             <a:prstDash val="solid"/>
           </a:ln>
         </p:spPr>
+        <p:txBody>
+          <a:bodyPr/>
+          <a:lstStyle/>
+          <a:p>
+            <a:endParaRPr lang="ko-KR" altLang="en-US"/>
+          </a:p>
+        </p:txBody>
       </p:sp>
       <p:sp>
         <p:nvSpPr>
@@ -15347,6 +16509,13 @@
           </a:solidFill>
           <a:ln/>
         </p:spPr>
+        <p:txBody>
+          <a:bodyPr/>
+          <a:lstStyle/>
+          <a:p>
+            <a:endParaRPr lang="ko-KR" altLang="en-US"/>
+          </a:p>
+        </p:txBody>
       </p:sp>
       <p:sp>
         <p:nvSpPr>
@@ -15413,6 +16582,13 @@
             </a:outerShdw>
           </a:effectLst>
         </p:spPr>
+        <p:txBody>
+          <a:bodyPr/>
+          <a:lstStyle/>
+          <a:p>
+            <a:endParaRPr lang="ko-KR" altLang="en-US"/>
+          </a:p>
+        </p:txBody>
       </p:sp>
       <p:sp>
         <p:nvSpPr>
@@ -15560,6 +16736,13 @@
             <a:tailEnd type="triangle"/>
           </a:ln>
         </p:spPr>
+        <p:txBody>
+          <a:bodyPr/>
+          <a:lstStyle/>
+          <a:p>
+            <a:endParaRPr lang="ko-KR" altLang="en-US"/>
+          </a:p>
+        </p:txBody>
       </p:sp>
       <p:sp>
         <p:nvSpPr>
@@ -15587,6 +16770,13 @@
             </a:outerShdw>
           </a:effectLst>
         </p:spPr>
+        <p:txBody>
+          <a:bodyPr/>
+          <a:lstStyle/>
+          <a:p>
+            <a:endParaRPr lang="ko-KR" altLang="en-US"/>
+          </a:p>
+        </p:txBody>
       </p:sp>
       <p:sp>
         <p:nvSpPr>
@@ -15734,6 +16924,13 @@
             <a:tailEnd type="triangle"/>
           </a:ln>
         </p:spPr>
+        <p:txBody>
+          <a:bodyPr/>
+          <a:lstStyle/>
+          <a:p>
+            <a:endParaRPr lang="ko-KR" altLang="en-US"/>
+          </a:p>
+        </p:txBody>
       </p:sp>
       <p:sp>
         <p:nvSpPr>
@@ -15761,6 +16958,13 @@
             </a:outerShdw>
           </a:effectLst>
         </p:spPr>
+        <p:txBody>
+          <a:bodyPr/>
+          <a:lstStyle/>
+          <a:p>
+            <a:endParaRPr lang="ko-KR" altLang="en-US"/>
+          </a:p>
+        </p:txBody>
       </p:sp>
       <p:sp>
         <p:nvSpPr>
@@ -15908,6 +17112,13 @@
             <a:tailEnd type="triangle"/>
           </a:ln>
         </p:spPr>
+        <p:txBody>
+          <a:bodyPr/>
+          <a:lstStyle/>
+          <a:p>
+            <a:endParaRPr lang="ko-KR" altLang="en-US"/>
+          </a:p>
+        </p:txBody>
       </p:sp>
       <p:sp>
         <p:nvSpPr>
@@ -15935,6 +17146,13 @@
             </a:outerShdw>
           </a:effectLst>
         </p:spPr>
+        <p:txBody>
+          <a:bodyPr/>
+          <a:lstStyle/>
+          <a:p>
+            <a:endParaRPr lang="ko-KR" altLang="en-US"/>
+          </a:p>
+        </p:txBody>
       </p:sp>
       <p:sp>
         <p:nvSpPr>
@@ -16082,6 +17300,13 @@
             <a:tailEnd type="triangle"/>
           </a:ln>
         </p:spPr>
+        <p:txBody>
+          <a:bodyPr/>
+          <a:lstStyle/>
+          <a:p>
+            <a:endParaRPr lang="ko-KR" altLang="en-US"/>
+          </a:p>
+        </p:txBody>
       </p:sp>
       <p:sp>
         <p:nvSpPr>
@@ -16109,6 +17334,13 @@
             </a:outerShdw>
           </a:effectLst>
         </p:spPr>
+        <p:txBody>
+          <a:bodyPr/>
+          <a:lstStyle/>
+          <a:p>
+            <a:endParaRPr lang="ko-KR" altLang="en-US"/>
+          </a:p>
+        </p:txBody>
       </p:sp>
       <p:sp>
         <p:nvSpPr>
@@ -16259,6 +17491,13 @@
             <a:prstDash val="solid"/>
           </a:ln>
         </p:spPr>
+        <p:txBody>
+          <a:bodyPr/>
+          <a:lstStyle/>
+          <a:p>
+            <a:endParaRPr lang="ko-KR" altLang="en-US"/>
+          </a:p>
+        </p:txBody>
       </p:sp>
       <p:sp>
         <p:nvSpPr>
@@ -16281,6 +17520,13 @@
           </a:solidFill>
           <a:ln/>
         </p:spPr>
+        <p:txBody>
+          <a:bodyPr/>
+          <a:lstStyle/>
+          <a:p>
+            <a:endParaRPr lang="ko-KR" altLang="en-US"/>
+          </a:p>
+        </p:txBody>
       </p:sp>
       <p:sp>
         <p:nvSpPr>
@@ -16386,6 +17632,13 @@
             <a:prstDash val="solid"/>
           </a:ln>
         </p:spPr>
+        <p:txBody>
+          <a:bodyPr/>
+          <a:lstStyle/>
+          <a:p>
+            <a:endParaRPr lang="ko-KR" altLang="en-US"/>
+          </a:p>
+        </p:txBody>
       </p:sp>
       <p:sp>
         <p:nvSpPr>
@@ -16491,6 +17744,13 @@
             <a:prstDash val="solid"/>
           </a:ln>
         </p:spPr>
+        <p:txBody>
+          <a:bodyPr/>
+          <a:lstStyle/>
+          <a:p>
+            <a:endParaRPr lang="ko-KR" altLang="en-US"/>
+          </a:p>
+        </p:txBody>
       </p:sp>
       <p:sp>
         <p:nvSpPr>
@@ -16596,6 +17856,13 @@
             <a:prstDash val="solid"/>
           </a:ln>
         </p:spPr>
+        <p:txBody>
+          <a:bodyPr/>
+          <a:lstStyle/>
+          <a:p>
+            <a:endParaRPr lang="ko-KR" altLang="en-US"/>
+          </a:p>
+        </p:txBody>
       </p:sp>
       <p:sp>
         <p:nvSpPr>
@@ -16698,6 +17965,13 @@
             <a:tailEnd type="oval" w="sm" len="sm"/>
           </a:ln>
         </p:spPr>
+        <p:txBody>
+          <a:bodyPr/>
+          <a:lstStyle/>
+          <a:p>
+            <a:endParaRPr lang="ko-KR" altLang="en-US"/>
+          </a:p>
+        </p:txBody>
       </p:sp>
       <p:sp>
         <p:nvSpPr>
@@ -16722,6 +17996,13 @@
             <a:tailEnd type="oval" w="sm" len="sm"/>
           </a:ln>
         </p:spPr>
+        <p:txBody>
+          <a:bodyPr/>
+          <a:lstStyle/>
+          <a:p>
+            <a:endParaRPr lang="ko-KR" altLang="en-US"/>
+          </a:p>
+        </p:txBody>
       </p:sp>
       <p:sp>
         <p:nvSpPr>
@@ -16747,6 +18028,13 @@
             <a:tailEnd type="triangle"/>
           </a:ln>
         </p:spPr>
+        <p:txBody>
+          <a:bodyPr/>
+          <a:lstStyle/>
+          <a:p>
+            <a:endParaRPr lang="ko-KR" altLang="en-US"/>
+          </a:p>
+        </p:txBody>
       </p:sp>
       <p:sp>
         <p:nvSpPr>
@@ -16772,6 +18060,13 @@
             <a:tailEnd type="triangle"/>
           </a:ln>
         </p:spPr>
+        <p:txBody>
+          <a:bodyPr/>
+          <a:lstStyle/>
+          <a:p>
+            <a:endParaRPr lang="ko-KR" altLang="en-US"/>
+          </a:p>
+        </p:txBody>
       </p:sp>
       <p:sp>
         <p:nvSpPr>
@@ -16799,6 +18094,13 @@
             <a:prstDash val="solid"/>
           </a:ln>
         </p:spPr>
+        <p:txBody>
+          <a:bodyPr/>
+          <a:lstStyle/>
+          <a:p>
+            <a:endParaRPr lang="ko-KR" altLang="en-US"/>
+          </a:p>
+        </p:txBody>
       </p:sp>
       <p:sp>
         <p:nvSpPr>
@@ -16821,6 +18123,13 @@
           </a:solidFill>
           <a:ln/>
         </p:spPr>
+        <p:txBody>
+          <a:bodyPr/>
+          <a:lstStyle/>
+          <a:p>
+            <a:endParaRPr lang="ko-KR" altLang="en-US"/>
+          </a:p>
+        </p:txBody>
       </p:sp>
       <p:sp>
         <p:nvSpPr>
@@ -17176,6 +18485,13 @@
             </a:outerShdw>
           </a:effectLst>
         </p:spPr>
+        <p:txBody>
+          <a:bodyPr/>
+          <a:lstStyle/>
+          <a:p>
+            <a:endParaRPr lang="ko-KR" altLang="en-US"/>
+          </a:p>
+        </p:txBody>
       </p:sp>
       <p:sp>
         <p:nvSpPr>
@@ -17198,6 +18514,13 @@
           </a:solidFill>
           <a:ln/>
         </p:spPr>
+        <p:txBody>
+          <a:bodyPr/>
+          <a:lstStyle/>
+          <a:p>
+            <a:endParaRPr lang="ko-KR" altLang="en-US"/>
+          </a:p>
+        </p:txBody>
       </p:sp>
       <p:sp>
         <p:nvSpPr>
@@ -17218,6 +18541,13 @@
           </a:solidFill>
           <a:ln/>
         </p:spPr>
+        <p:txBody>
+          <a:bodyPr/>
+          <a:lstStyle/>
+          <a:p>
+            <a:endParaRPr lang="ko-KR" altLang="en-US"/>
+          </a:p>
+        </p:txBody>
       </p:sp>
       <p:sp>
         <p:nvSpPr>
@@ -17238,6 +18568,13 @@
           </a:solidFill>
           <a:ln/>
         </p:spPr>
+        <p:txBody>
+          <a:bodyPr/>
+          <a:lstStyle/>
+          <a:p>
+            <a:endParaRPr lang="ko-KR" altLang="en-US"/>
+          </a:p>
+        </p:txBody>
       </p:sp>
       <p:sp>
         <p:nvSpPr>
@@ -17258,6 +18595,13 @@
           </a:solidFill>
           <a:ln/>
         </p:spPr>
+        <p:txBody>
+          <a:bodyPr/>
+          <a:lstStyle/>
+          <a:p>
+            <a:endParaRPr lang="ko-KR" altLang="en-US"/>
+          </a:p>
+        </p:txBody>
       </p:sp>
       <p:sp>
         <p:nvSpPr>
@@ -17278,6 +18622,13 @@
           </a:solidFill>
           <a:ln/>
         </p:spPr>
+        <p:txBody>
+          <a:bodyPr/>
+          <a:lstStyle/>
+          <a:p>
+            <a:endParaRPr lang="ko-KR" altLang="en-US"/>
+          </a:p>
+        </p:txBody>
       </p:sp>
       <p:sp>
         <p:nvSpPr>
